--- a/初赛/初赛.pptx
+++ b/初赛/初赛.pptx
@@ -3474,8 +3474,8 @@
         </p:nvSpPr>
         <p:spPr>
           <a:xfrm>
-            <a:off x="660400" y="4343778"/>
-            <a:ext cx="3348426" cy="674983"/>
+            <a:off x="660400" y="4069644"/>
+            <a:ext cx="4505052" cy="949117"/>
           </a:xfrm>
         </p:spPr>
         <p:txBody>
@@ -3493,13 +3493,83 @@
               </a:spcBef>
             </a:pPr>
             <a:r>
-              <a:rPr lang="en-US" sz="1600" b="0" i="0" u="none" dirty="0" err="1">
+              <a:rPr lang="en-US" sz="1600" b="1" i="0" u="none" dirty="0" err="1">
                 <a:solidFill>
                   <a:srgbClr val="FFFFFF"/>
                 </a:solidFill>
                 <a:ea typeface="微软雅黑" panose="020B0503020204020204" charset="-122"/>
               </a:rPr>
               <a:t>洞察开发者行为，助力开源生态发展</a:t>
+            </a:r>
+            <a:endParaRPr lang="en-US" sz="1600" b="1" i="0" u="none" dirty="0">
+              <a:solidFill>
+                <a:srgbClr val="FFFFFF"/>
+              </a:solidFill>
+              <a:ea typeface="微软雅黑" panose="020B0503020204020204" charset="-122"/>
+            </a:endParaRPr>
+          </a:p>
+          <a:p>
+            <a:pPr algn="ctr">
+              <a:lnSpc>
+                <a:spcPct val="120000"/>
+              </a:lnSpc>
+              <a:spcBef>
+                <a:spcPts val="1000"/>
+              </a:spcBef>
+            </a:pPr>
+            <a:r>
+              <a:rPr lang="en-US" altLang="zh-CN" sz="1600" b="0" i="0" u="none" dirty="0">
+                <a:solidFill>
+                  <a:srgbClr val="FFFFFF"/>
+                </a:solidFill>
+                <a:ea typeface="微软雅黑" panose="020B0503020204020204" charset="-122"/>
+              </a:rPr>
+              <a:t>W2</a:t>
+            </a:r>
+            <a:r>
+              <a:rPr lang="zh-CN" altLang="en-US" sz="1600" b="0" i="0" u="none" dirty="0">
+                <a:solidFill>
+                  <a:srgbClr val="FFFFFF"/>
+                </a:solidFill>
+                <a:ea typeface="微软雅黑" panose="020B0503020204020204" charset="-122"/>
+              </a:rPr>
+              <a:t>：开源领域的可视化大屏 </a:t>
+            </a:r>
+            <a:r>
+              <a:rPr lang="en-US" altLang="zh-CN" sz="1600" b="0" i="0" u="none" dirty="0">
+                <a:solidFill>
+                  <a:srgbClr val="FFFFFF"/>
+                </a:solidFill>
+                <a:ea typeface="微软雅黑" panose="020B0503020204020204" charset="-122"/>
+              </a:rPr>
+              <a:t>(Dashboard </a:t>
+            </a:r>
+            <a:r>
+              <a:rPr lang="zh-CN" altLang="en-US" sz="1600" b="0" i="0" u="none" dirty="0">
+                <a:solidFill>
+                  <a:srgbClr val="FFFFFF"/>
+                </a:solidFill>
+                <a:ea typeface="微软雅黑" panose="020B0503020204020204" charset="-122"/>
+              </a:rPr>
+              <a:t>类作品</a:t>
+            </a:r>
+            <a:r>
+              <a:rPr lang="en-US" altLang="zh-CN" sz="1600" b="0" i="0" u="none" dirty="0">
+                <a:solidFill>
+                  <a:srgbClr val="FFFFFF"/>
+                </a:solidFill>
+                <a:ea typeface="微软雅黑" panose="020B0503020204020204" charset="-122"/>
+              </a:rPr>
+              <a:t>)</a:t>
+            </a:r>
+            <a:r>
+              <a:rPr lang="zh-CN" altLang="en-US" sz="1600" b="0" i="0" u="none" dirty="0">
+                <a:solidFill>
+                  <a:srgbClr val="FFFFFF"/>
+                </a:solidFill>
+                <a:ea typeface="微软雅黑" panose="020B0503020204020204" charset="-122"/>
+              </a:rPr>
+              <a:t>。</a:t>
             </a:r>
             <a:endParaRPr lang="en-US" sz="1600" b="0" i="0" u="none" dirty="0">
               <a:solidFill>
